--- a/P30_slides.pptx
+++ b/P30_slides.pptx
@@ -3539,7 +3539,7 @@
               </a:defRPr>
             </a:pPr>
             <a:r>
-              <a:t>• D3's 6 spurious null-space eigenvalues</a:t>
+              <a:t>• D3's 6 spurious null-space eigenvalues (from the proven rank deficiency) sit near the origin, cleanly separated from the 19 real modes near |λ|=1</a:t>
             </a:r>
           </a:p>
           <a:p>
@@ -3554,82 +3554,7 @@
               </a:defRPr>
             </a:pPr>
             <a:r>
-              <a:t>• (from the proven rank deficiency) sit</a:t>
-            </a:r>
-          </a:p>
-          <a:p>
-            <a:pPr>
-              <a:spcAft>
-                <a:spcPts val="800"/>
-              </a:spcAft>
-              <a:defRPr sz="1500">
-                <a:solidFill>
-                  <a:srgbClr val="222222"/>
-                </a:solidFill>
-              </a:defRPr>
-            </a:pPr>
-            <a:r>
-              <a:t>• near the origin, cleanly separated</a:t>
-            </a:r>
-          </a:p>
-          <a:p>
-            <a:pPr>
-              <a:spcAft>
-                <a:spcPts val="800"/>
-              </a:spcAft>
-              <a:defRPr sz="1500">
-                <a:solidFill>
-                  <a:srgbClr val="222222"/>
-                </a:solidFill>
-              </a:defRPr>
-            </a:pPr>
-            <a:r>
-              <a:t>• from the 19 real modes near |λ|=1</a:t>
-            </a:r>
-          </a:p>
-          <a:p>
-            <a:pPr>
-              <a:spcAft>
-                <a:spcPts val="800"/>
-              </a:spcAft>
-              <a:defRPr sz="1500">
-                <a:solidFill>
-                  <a:srgbClr val="222222"/>
-                </a:solidFill>
-              </a:defRPr>
-            </a:pPr>
-            <a:r>
-              <a:t>• This disagreement is NOT resolved from</a:t>
-            </a:r>
-          </a:p>
-          <a:p>
-            <a:pPr>
-              <a:spcAft>
-                <a:spcPts val="800"/>
-              </a:spcAft>
-              <a:defRPr sz="1500">
-                <a:solidFill>
-                  <a:srgbClr val="222222"/>
-                </a:solidFill>
-              </a:defRPr>
-            </a:pPr>
-            <a:r>
-              <a:t>• eigenmodes alone — tested next against</a:t>
-            </a:r>
-          </a:p>
-          <a:p>
-            <a:pPr>
-              <a:spcAft>
-                <a:spcPts val="800"/>
-              </a:spcAft>
-              <a:defRPr sz="1500">
-                <a:solidFill>
-                  <a:srgbClr val="222222"/>
-                </a:solidFill>
-              </a:defRPr>
-            </a:pPr>
-            <a:r>
-              <a:t>• simulated ground truth</a:t>
+              <a:t>• This disagreement is NOT resolved from eigenmodes alone — tested next against simulated ground truth</a:t>
             </a:r>
           </a:p>
         </p:txBody>
@@ -4033,7 +3958,7 @@
               </a:defRPr>
             </a:pPr>
             <a:r>
-              <a:t>• Ground truth: cut each ward's</a:t>
+              <a:t>• Ground truth: cut each ward's contacts 50%, measure the drop in colonized person-days (100 replicates, common random numbers, paired comparison)</a:t>
             </a:r>
           </a:p>
           <a:p>
@@ -4048,112 +3973,7 @@
               </a:defRPr>
             </a:pPr>
             <a:r>
-              <a:t>• contacts 50%, measure the drop</a:t>
-            </a:r>
-          </a:p>
-          <a:p>
-            <a:pPr>
-              <a:spcAft>
-                <a:spcPts val="800"/>
-              </a:spcAft>
-              <a:defRPr sz="1500">
-                <a:solidFill>
-                  <a:srgbClr val="222222"/>
-                </a:solidFill>
-              </a:defRPr>
-            </a:pPr>
-            <a:r>
-              <a:t>• in colonized person-days</a:t>
-            </a:r>
-          </a:p>
-          <a:p>
-            <a:pPr>
-              <a:spcAft>
-                <a:spcPts val="800"/>
-              </a:spcAft>
-              <a:defRPr sz="1500">
-                <a:solidFill>
-                  <a:srgbClr val="222222"/>
-                </a:solidFill>
-              </a:defRPr>
-            </a:pPr>
-            <a:r>
-              <a:t>• (100 replicates, common random</a:t>
-            </a:r>
-          </a:p>
-          <a:p>
-            <a:pPr>
-              <a:spcAft>
-                <a:spcPts val="800"/>
-              </a:spcAft>
-              <a:defRPr sz="1500">
-                <a:solidFill>
-                  <a:srgbClr val="222222"/>
-                </a:solidFill>
-              </a:defRPr>
-            </a:pPr>
-            <a:r>
-              <a:t>• numbers, paired comparison)</a:t>
-            </a:r>
-          </a:p>
-          <a:p>
-            <a:pPr>
-              <a:spcAft>
-                <a:spcPts val="800"/>
-              </a:spcAft>
-              <a:defRPr sz="1500">
-                <a:solidFill>
-                  <a:srgbClr val="222222"/>
-                </a:solidFill>
-              </a:defRPr>
-            </a:pPr>
-            <a:r>
-              <a:t>• </a:t>
-            </a:r>
-          </a:p>
-          <a:p>
-            <a:pPr>
-              <a:spcAft>
-                <a:spcPts val="800"/>
-              </a:spcAft>
-              <a:defRPr sz="1500">
-                <a:solidFill>
-                  <a:srgbClr val="222222"/>
-                </a:solidFill>
-              </a:defRPr>
-            </a:pPr>
-            <a:r>
-              <a:t>• Ranking: Menard 1 &gt; Sorrel 1 &gt;</a:t>
-            </a:r>
-          </a:p>
-          <a:p>
-            <a:pPr>
-              <a:spcAft>
-                <a:spcPts val="800"/>
-              </a:spcAft>
-              <a:defRPr sz="1500">
-                <a:solidFill>
-                  <a:srgbClr val="222222"/>
-                </a:solidFill>
-              </a:defRPr>
-            </a:pPr>
-            <a:r>
-              <a:t>• Menard 2 &gt; Sorrel 2 &gt; Sorrel 0 &gt;</a:t>
-            </a:r>
-          </a:p>
-          <a:p>
-            <a:pPr>
-              <a:spcAft>
-                <a:spcPts val="800"/>
-              </a:spcAft>
-              <a:defRPr sz="1500">
-                <a:solidFill>
-                  <a:srgbClr val="222222"/>
-                </a:solidFill>
-              </a:defRPr>
-            </a:pPr>
-            <a:r>
-              <a:t>• Other</a:t>
+              <a:t>• Ranking: Menard 1 &gt; Sorrel 1 &gt; Menard 2 &gt; Sorrel 2 &gt; Sorrel 0 &gt; Other</a:t>
             </a:r>
           </a:p>
         </p:txBody>
@@ -4751,7 +4571,7 @@
               </a:defRPr>
             </a:pPr>
             <a:r>
-              <a:t>• ground_truth, degree_centrality,</a:t>
+              <a:t>• ground_truth, degree_centrality, and eigenvector_centrality columns look nearly identical</a:t>
             </a:r>
           </a:p>
           <a:p>
@@ -4766,7 +4586,7 @@
               </a:defRPr>
             </a:pPr>
             <a:r>
-              <a:t>• and eigenvector_centrality</a:t>
+              <a:t>• The three koopman columns look comparatively scrambled</a:t>
             </a:r>
           </a:p>
           <a:p>
@@ -4781,127 +4601,7 @@
               </a:defRPr>
             </a:pPr>
             <a:r>
-              <a:t>• columns look nearly identical</a:t>
-            </a:r>
-          </a:p>
-          <a:p>
-            <a:pPr>
-              <a:spcAft>
-                <a:spcPts val="800"/>
-              </a:spcAft>
-              <a:defRPr sz="1500">
-                <a:solidFill>
-                  <a:srgbClr val="222222"/>
-                </a:solidFill>
-              </a:defRPr>
-            </a:pPr>
-            <a:r>
-              <a:t>• </a:t>
-            </a:r>
-          </a:p>
-          <a:p>
-            <a:pPr>
-              <a:spcAft>
-                <a:spcPts val="800"/>
-              </a:spcAft>
-              <a:defRPr sz="1500">
-                <a:solidFill>
-                  <a:srgbClr val="222222"/>
-                </a:solidFill>
-              </a:defRPr>
-            </a:pPr>
-            <a:r>
-              <a:t>• The three koopman columns</a:t>
-            </a:r>
-          </a:p>
-          <a:p>
-            <a:pPr>
-              <a:spcAft>
-                <a:spcPts val="800"/>
-              </a:spcAft>
-              <a:defRPr sz="1500">
-                <a:solidFill>
-                  <a:srgbClr val="222222"/>
-                </a:solidFill>
-              </a:defRPr>
-            </a:pPr>
-            <a:r>
-              <a:t>• look comparatively scrambled</a:t>
-            </a:r>
-          </a:p>
-          <a:p>
-            <a:pPr>
-              <a:spcAft>
-                <a:spcPts val="800"/>
-              </a:spcAft>
-              <a:defRPr sz="1500">
-                <a:solidFill>
-                  <a:srgbClr val="222222"/>
-                </a:solidFill>
-              </a:defRPr>
-            </a:pPr>
-            <a:r>
-              <a:t>• </a:t>
-            </a:r>
-          </a:p>
-          <a:p>
-            <a:pPr>
-              <a:spcAft>
-                <a:spcPts val="800"/>
-              </a:spcAft>
-              <a:defRPr sz="1500">
-                <a:solidFill>
-                  <a:srgbClr val="222222"/>
-                </a:solidFill>
-              </a:defRPr>
-            </a:pPr>
-            <a:r>
-              <a:t>• Nuance: koopman_D1 DOES pick</a:t>
-            </a:r>
-          </a:p>
-          <a:p>
-            <a:pPr>
-              <a:spcAft>
-                <a:spcPts val="800"/>
-              </a:spcAft>
-              <a:defRPr sz="1500">
-                <a:solidFill>
-                  <a:srgbClr val="222222"/>
-                </a:solidFill>
-              </a:defRPr>
-            </a:pPr>
-            <a:r>
-              <a:t>• the #1 ward correctly (Menard 1)</a:t>
-            </a:r>
-          </a:p>
-          <a:p>
-            <a:pPr>
-              <a:spcAft>
-                <a:spcPts val="800"/>
-              </a:spcAft>
-              <a:defRPr sz="1500">
-                <a:solidFill>
-                  <a:srgbClr val="222222"/>
-                </a:solidFill>
-              </a:defRPr>
-            </a:pPr>
-            <a:r>
-              <a:t>• — but has the worst OVERALL</a:t>
-            </a:r>
-          </a:p>
-          <a:p>
-            <a:pPr>
-              <a:spcAft>
-                <a:spcPts val="800"/>
-              </a:spcAft>
-              <a:defRPr sz="1500">
-                <a:solidFill>
-                  <a:srgbClr val="222222"/>
-                </a:solidFill>
-              </a:defRPr>
-            </a:pPr>
-            <a:r>
-              <a:t>• rank correlation of the three</a:t>
+              <a:t>• Nuance: koopman_D1 DOES pick the #1 ward correctly (Menard 1) — but has the worst OVERALL rank correlation of the three</a:t>
             </a:r>
           </a:p>
         </p:txBody>
@@ -5051,7 +4751,7 @@
               </a:defRPr>
             </a:pPr>
             <a:r>
-              <a:t>• Equal-budget framework:</a:t>
+              <a:t>• Equal-budget framework: budget = k × reduction fraction</a:t>
             </a:r>
           </a:p>
           <a:p>
@@ -5066,7 +4766,7 @@
               </a:defRPr>
             </a:pPr>
             <a:r>
-              <a:t>• budget = k × reduction fraction</a:t>
+              <a:t>• Every TARGETED strategy beats BOTH untargeted strategies (random, whole-hospital) at every matching budget</a:t>
             </a:r>
           </a:p>
           <a:p>
@@ -5081,142 +4781,7 @@
               </a:defRPr>
             </a:pPr>
             <a:r>
-              <a:t>• </a:t>
-            </a:r>
-          </a:p>
-          <a:p>
-            <a:pPr>
-              <a:spcAft>
-                <a:spcPts val="800"/>
-              </a:spcAft>
-              <a:defRPr sz="1500">
-                <a:solidFill>
-                  <a:srgbClr val="222222"/>
-                </a:solidFill>
-              </a:defRPr>
-            </a:pPr>
-            <a:r>
-              <a:t>• Every TARGETED strategy beats</a:t>
-            </a:r>
-          </a:p>
-          <a:p>
-            <a:pPr>
-              <a:spcAft>
-                <a:spcPts val="800"/>
-              </a:spcAft>
-              <a:defRPr sz="1500">
-                <a:solidFill>
-                  <a:srgbClr val="222222"/>
-                </a:solidFill>
-              </a:defRPr>
-            </a:pPr>
-            <a:r>
-              <a:t>• BOTH untargeted strategies</a:t>
-            </a:r>
-          </a:p>
-          <a:p>
-            <a:pPr>
-              <a:spcAft>
-                <a:spcPts val="800"/>
-              </a:spcAft>
-              <a:defRPr sz="1500">
-                <a:solidFill>
-                  <a:srgbClr val="222222"/>
-                </a:solidFill>
-              </a:defRPr>
-            </a:pPr>
-            <a:r>
-              <a:t>• (random, whole-hospital) at</a:t>
-            </a:r>
-          </a:p>
-          <a:p>
-            <a:pPr>
-              <a:spcAft>
-                <a:spcPts val="800"/>
-              </a:spcAft>
-              <a:defRPr sz="1500">
-                <a:solidFill>
-                  <a:srgbClr val="222222"/>
-                </a:solidFill>
-              </a:defRPr>
-            </a:pPr>
-            <a:r>
-              <a:t>• every matching budget</a:t>
-            </a:r>
-          </a:p>
-          <a:p>
-            <a:pPr>
-              <a:spcAft>
-                <a:spcPts val="800"/>
-              </a:spcAft>
-              <a:defRPr sz="1500">
-                <a:solidFill>
-                  <a:srgbClr val="222222"/>
-                </a:solidFill>
-              </a:defRPr>
-            </a:pPr>
-            <a:r>
-              <a:t>• </a:t>
-            </a:r>
-          </a:p>
-          <a:p>
-            <a:pPr>
-              <a:spcAft>
-                <a:spcPts val="800"/>
-              </a:spcAft>
-              <a:defRPr sz="1500">
-                <a:solidFill>
-                  <a:srgbClr val="222222"/>
-                </a:solidFill>
-              </a:defRPr>
-            </a:pPr>
-            <a:r>
-              <a:t>• At k=2: koopman_D2/D3 slightly</a:t>
-            </a:r>
-          </a:p>
-          <a:p>
-            <a:pPr>
-              <a:spcAft>
-                <a:spcPts val="800"/>
-              </a:spcAft>
-              <a:defRPr sz="1500">
-                <a:solidFill>
-                  <a:srgbClr val="222222"/>
-                </a:solidFill>
-              </a:defRPr>
-            </a:pPr>
-            <a:r>
-              <a:t>• beats degree-targeting — a higher</a:t>
-            </a:r>
-          </a:p>
-          <a:p>
-            <a:pPr>
-              <a:spcAft>
-                <a:spcPts val="800"/>
-              </a:spcAft>
-              <a:defRPr sz="1500">
-                <a:solidFill>
-                  <a:srgbClr val="222222"/>
-                </a:solidFill>
-              </a:defRPr>
-            </a:pPr>
-            <a:r>
-              <a:t>• overall correlation doesn't</a:t>
-            </a:r>
-          </a:p>
-          <a:p>
-            <a:pPr>
-              <a:spcAft>
-                <a:spcPts val="800"/>
-              </a:spcAft>
-              <a:defRPr sz="1500">
-                <a:solidFill>
-                  <a:srgbClr val="222222"/>
-                </a:solidFill>
-              </a:defRPr>
-            </a:pPr>
-            <a:r>
-              <a:t>• guarantee the better k=2 pick</a:t>
+              <a:t>• At k=2: koopman_D2/D3 slightly beats degree-targeting — a higher overall correlation doesn't guarantee the better k=2 pick</a:t>
             </a:r>
           </a:p>
         </p:txBody>
@@ -5884,7 +5449,7 @@
               </a:defRPr>
             </a:pPr>
             <a:r>
-              <a:t>• The Koopman/EDMD machinery works and was built/verified rigorously</a:t>
+              <a:t>• The Koopman/EDMD machinery works and was built/verified rigorously (exact recovery on synthetic systems, closed-form agreement, 179 tests)</a:t>
             </a:r>
           </a:p>
           <a:p>
@@ -5899,7 +5464,7 @@
               </a:defRPr>
             </a:pPr>
             <a:r>
-              <a:t>• (exact recovery on synthetic systems, closed-form agreement, 179 tests)</a:t>
+              <a:t>• On THIS dataset, it does not outperform simpler alternatives — reported honestly, with three concrete, verifiable reasons:</a:t>
             </a:r>
           </a:p>
           <a:p>
@@ -5907,6 +5472,51 @@
               <a:spcAft>
                 <a:spcPts val="1000"/>
               </a:spcAft>
+              <a:defRPr sz="1700">
+                <a:solidFill>
+                  <a:srgbClr val="222222"/>
+                </a:solidFill>
+              </a:defRPr>
+            </a:pPr>
+            <a:r>
+              <a:t>   - (a) SIS calibration sits on a weakly-identified ridge (~16 real snapshots)</a:t>
+            </a:r>
+          </a:p>
+          <a:p>
+            <a:pPr>
+              <a:spcAft>
+                <a:spcPts val="1000"/>
+              </a:spcAft>
+              <a:defRPr sz="1700">
+                <a:solidFill>
+                  <a:srgbClr val="222222"/>
+                </a:solidFill>
+              </a:defRPr>
+            </a:pPr>
+            <a:r>
+              <a:t>   - (b) D3, the “network-aware” dictionary, is PROVABLY no richer than D2</a:t>
+            </a:r>
+          </a:p>
+          <a:p>
+            <a:pPr>
+              <a:spcAft>
+                <a:spcPts val="1000"/>
+              </a:spcAft>
+              <a:defRPr sz="1700">
+                <a:solidFill>
+                  <a:srgbClr val="222222"/>
+                </a:solidFill>
+              </a:defRPr>
+            </a:pPr>
+            <a:r>
+              <a:t>   - (c) raw ward contact volume is a strong, nearly-free predictor</a:t>
+            </a:r>
+          </a:p>
+          <a:p>
+            <a:pPr>
+              <a:spcAft>
+                <a:spcPts val="1000"/>
+              </a:spcAft>
               <a:defRPr sz="2000">
                 <a:solidFill>
                   <a:srgbClr val="222222"/>
@@ -5914,97 +5524,7 @@
               </a:defRPr>
             </a:pPr>
             <a:r>
-              <a:t>• On THIS dataset, it does not outperform simpler alternatives — reported</a:t>
-            </a:r>
-          </a:p>
-          <a:p>
-            <a:pPr>
-              <a:spcAft>
-                <a:spcPts val="1000"/>
-              </a:spcAft>
-              <a:defRPr sz="2000">
-                <a:solidFill>
-                  <a:srgbClr val="222222"/>
-                </a:solidFill>
-              </a:defRPr>
-            </a:pPr>
-            <a:r>
-              <a:t>• honestly, with three concrete, verifiable reasons:</a:t>
-            </a:r>
-          </a:p>
-          <a:p>
-            <a:pPr>
-              <a:spcAft>
-                <a:spcPts val="1000"/>
-              </a:spcAft>
-              <a:defRPr sz="1700">
-                <a:solidFill>
-                  <a:srgbClr val="222222"/>
-                </a:solidFill>
-              </a:defRPr>
-            </a:pPr>
-            <a:r>
-              <a:t>   - (a) SIS calibration sits on a weakly-identified ridge (~16 real snapshots)</a:t>
-            </a:r>
-          </a:p>
-          <a:p>
-            <a:pPr>
-              <a:spcAft>
-                <a:spcPts val="1000"/>
-              </a:spcAft>
-              <a:defRPr sz="1700">
-                <a:solidFill>
-                  <a:srgbClr val="222222"/>
-                </a:solidFill>
-              </a:defRPr>
-            </a:pPr>
-            <a:r>
-              <a:t>   - (b) D3, the “network-aware” dictionary, is PROVABLY no richer than D2</a:t>
-            </a:r>
-          </a:p>
-          <a:p>
-            <a:pPr>
-              <a:spcAft>
-                <a:spcPts val="1000"/>
-              </a:spcAft>
-              <a:defRPr sz="1700">
-                <a:solidFill>
-                  <a:srgbClr val="222222"/>
-                </a:solidFill>
-              </a:defRPr>
-            </a:pPr>
-            <a:r>
-              <a:t>   - (c) raw ward contact volume is a strong, nearly-free predictor</a:t>
-            </a:r>
-          </a:p>
-          <a:p>
-            <a:pPr>
-              <a:spcAft>
-                <a:spcPts val="1000"/>
-              </a:spcAft>
-              <a:defRPr sz="2000">
-                <a:solidFill>
-                  <a:srgbClr val="222222"/>
-                </a:solidFill>
-              </a:defRPr>
-            </a:pPr>
-            <a:r>
-              <a:t>• Targeting still matters enormously, independent of which score is used —</a:t>
-            </a:r>
-          </a:p>
-          <a:p>
-            <a:pPr>
-              <a:spcAft>
-                <a:spcPts val="1000"/>
-              </a:spcAft>
-              <a:defRPr sz="2000">
-                <a:solidFill>
-                  <a:srgbClr val="222222"/>
-                </a:solidFill>
-              </a:defRPr>
-            </a:pPr>
-            <a:r>
-              <a:t>• a practically actionable finding that survives every robustness check</a:t>
+              <a:t>• Targeting still matters enormously, independent of which score is used — a practically actionable finding that survives every robustness check</a:t>
             </a:r>
           </a:p>
         </p:txBody>
@@ -6382,7 +5902,7 @@
               </a:defRPr>
             </a:pPr>
             <a:r>
-              <a:t>• Built a complete, rigorously-tested pipeline: real network → calibrated</a:t>
+              <a:t>• Built a complete, rigorously-tested pipeline: real network → calibrated SIS simulator → EDMD → eigenmodes → validated against simulated ground truth</a:t>
             </a:r>
           </a:p>
           <a:p>
@@ -6397,37 +5917,7 @@
               </a:defRPr>
             </a:pPr>
             <a:r>
-              <a:t>• SIS simulator → EDMD → eigenmodes → validated against simulated ground truth</a:t>
-            </a:r>
-          </a:p>
-          <a:p>
-            <a:pPr>
-              <a:spcAft>
-                <a:spcPts val="1000"/>
-              </a:spcAft>
-              <a:defRPr sz="2000">
-                <a:solidFill>
-                  <a:srgbClr val="222222"/>
-                </a:solidFill>
-              </a:defRPr>
-            </a:pPr>
-            <a:r>
-              <a:t>• Honest answer: network-aware Koopman eigenmodes do not beat simple</a:t>
-            </a:r>
-          </a:p>
-          <a:p>
-            <a:pPr>
-              <a:spcAft>
-                <a:spcPts val="1000"/>
-              </a:spcAft>
-              <a:defRPr sz="2000">
-                <a:solidFill>
-                  <a:srgbClr val="222222"/>
-                </a:solidFill>
-              </a:defRPr>
-            </a:pPr>
-            <a:r>
-              <a:t>• degree centrality for THIS dataset — traced to specific, understood causes</a:t>
+              <a:t>• Honest answer: network-aware Koopman eigenmodes do not beat simple degree centrality for THIS dataset — traced to specific, understood causes</a:t>
             </a:r>
           </a:p>
           <a:p>
@@ -6578,7 +6068,7 @@
               </a:defRPr>
             </a:pPr>
             <a:r>
-              <a:t>• Obadia, T., Silhol, R., Opatowski, L., Temime, L., Legrand, J.,</a:t>
+              <a:t>• Obadia, T., Silhol, R., Opatowski, L., Temime, L., Legrand, J., Thiébaut, A.C.M., et al. (2015). Detailed Contact Data and the Dissemination of Staphylococcus aureus in Hospitals. PLOS Computational Biology, 11(3):e1004170.</a:t>
             </a:r>
           </a:p>
           <a:p>
@@ -6593,112 +6083,7 @@
               </a:defRPr>
             </a:pPr>
             <a:r>
-              <a:t>• Thiébaut, A.C.M., et al. (2015). Detailed Contact Data and the</a:t>
-            </a:r>
-          </a:p>
-          <a:p>
-            <a:pPr>
-              <a:spcAft>
-                <a:spcPts val="1000"/>
-              </a:spcAft>
-              <a:defRPr sz="2000">
-                <a:solidFill>
-                  <a:srgbClr val="222222"/>
-                </a:solidFill>
-              </a:defRPr>
-            </a:pPr>
-            <a:r>
-              <a:t>• Dissemination of Staphylococcus aureus in Hospitals.</a:t>
-            </a:r>
-          </a:p>
-          <a:p>
-            <a:pPr>
-              <a:spcAft>
-                <a:spcPts val="1000"/>
-              </a:spcAft>
-              <a:defRPr sz="2000">
-                <a:solidFill>
-                  <a:srgbClr val="222222"/>
-                </a:solidFill>
-              </a:defRPr>
-            </a:pPr>
-            <a:r>
-              <a:t>• PLOS Computational Biology, 11(3):e1004170.</a:t>
-            </a:r>
-          </a:p>
-          <a:p>
-            <a:pPr>
-              <a:spcAft>
-                <a:spcPts val="1000"/>
-              </a:spcAft>
-              <a:defRPr sz="2000">
-                <a:solidFill>
-                  <a:srgbClr val="222222"/>
-                </a:solidFill>
-              </a:defRPr>
-            </a:pPr>
-            <a:r>
-              <a:t>• </a:t>
-            </a:r>
-          </a:p>
-          <a:p>
-            <a:pPr>
-              <a:spcAft>
-                <a:spcPts val="1000"/>
-              </a:spcAft>
-              <a:defRPr sz="2000">
-                <a:solidFill>
-                  <a:srgbClr val="222222"/>
-                </a:solidFill>
-              </a:defRPr>
-            </a:pPr>
-            <a:r>
-              <a:t>• Duval, A., Obadia, T., Martinet, L., Boëlle, P.Y., Fleury, E.,</a:t>
-            </a:r>
-          </a:p>
-          <a:p>
-            <a:pPr>
-              <a:spcAft>
-                <a:spcPts val="1000"/>
-              </a:spcAft>
-              <a:defRPr sz="2000">
-                <a:solidFill>
-                  <a:srgbClr val="222222"/>
-                </a:solidFill>
-              </a:defRPr>
-            </a:pPr>
-            <a:r>
-              <a:t>• Guillemot, D., et al. (2018). Measuring dynamic social contacts</a:t>
-            </a:r>
-          </a:p>
-          <a:p>
-            <a:pPr>
-              <a:spcAft>
-                <a:spcPts val="1000"/>
-              </a:spcAft>
-              <a:defRPr sz="2000">
-                <a:solidFill>
-                  <a:srgbClr val="222222"/>
-                </a:solidFill>
-              </a:defRPr>
-            </a:pPr>
-            <a:r>
-              <a:t>• in a rehabilitation hospital: effect of wards, patient and staff</a:t>
-            </a:r>
-          </a:p>
-          <a:p>
-            <a:pPr>
-              <a:spcAft>
-                <a:spcPts val="1000"/>
-              </a:spcAft>
-              <a:defRPr sz="2000">
-                <a:solidFill>
-                  <a:srgbClr val="222222"/>
-                </a:solidFill>
-              </a:defRPr>
-            </a:pPr>
-            <a:r>
-              <a:t>• characteristics. Scientific Reports, 8:1686.</a:t>
+              <a:t>• Duval, A., Obadia, T., Martinet, L., Boëlle, P.Y., Fleury, E., Guillemot, D., et al. (2018). Measuring dynamic social contacts in a rehabilitation hospital: effect of wards, patient and staff characteristics. Scientific Reports, 8:1686.</a:t>
             </a:r>
           </a:p>
         </p:txBody>
